--- a/dist/초6/국어/읽기와비판/초6_국어_읽기와비판_02_관점비교하며읽기.pptx
+++ b/dist/초6/국어/읽기와비판/초6_국어_읽기와비판_02_관점비교하며읽기.pptx
@@ -121,13 +121,13 @@
   <p:extLst>
     <p:ext uri="{521415D9-36F7-43E2-AB2F-B90AF26B5E84}">
       <p14:sectionLst xmlns:p14="http://schemas.microsoft.com/office/powerpoint/2010/main">
-        <p14:section name="도입" id="{8526d578-d50f-ec0f-b9ae-1922511e7249}">
+        <p14:section name="도입" id="{db3c5d24-c5bd-6a6f-41eb-7ba5ddffdbc9}">
           <p14:sldIdLst>
             <p14:sldId id="256"/>
             <p14:sldId id="257"/>
           </p14:sldIdLst>
         </p14:section>
-        <p14:section name="개념" id="{b0294ca2-a4a3-2297-20f7-d0fa4ee43bef}">
+        <p14:section name="개념" id="{44a080e8-3351-c796-ac20-7e02701e4c1d}">
           <p14:sldIdLst>
             <p14:sldId id="258"/>
             <p14:sldId id="259"/>
@@ -136,26 +136,26 @@
             <p14:sldId id="262"/>
           </p14:sldIdLst>
         </p14:section>
-        <p14:section name="연습" id="{f97b9f2a-9995-82a9-cbc3-a507f5ff2d5a}">
+        <p14:section name="연습" id="{e484d1f6-c8f9-b307-7aa2-88fa9ab1bf7e}">
           <p14:sldIdLst>
             <p14:sldId id="263"/>
             <p14:sldId id="264"/>
             <p14:sldId id="265"/>
           </p14:sldIdLst>
         </p14:section>
-        <p14:section name="확인" id="{150d2f43-c062-8a73-7758-30ffe677891b}">
+        <p14:section name="확인" id="{14dbb23b-75a4-9169-be8e-89bd7e4a103e}">
           <p14:sldIdLst>
             <p14:sldId id="266"/>
             <p14:sldId id="267"/>
             <p14:sldId id="268"/>
           </p14:sldIdLst>
         </p14:section>
-        <p14:section name="정리" id="{92146cc9-7110-04ff-4bf9-30ac10f76517}">
+        <p14:section name="정리" id="{82188b2b-59cd-ad42-f37a-4d10d1b3ffaf}">
           <p14:sldIdLst>
             <p14:sldId id="269"/>
           </p14:sldIdLst>
         </p14:section>
-        <p14:section name="보충" id="{cc39e14f-5dbf-fa19-49c8-67ec17c4b93b}">
+        <p14:section name="보충" id="{422f173e-ba7b-91bb-62d8-e0531e0cf5d8}">
           <p14:sldIdLst>
             <p14:sldId id="270"/>
           </p14:sldIdLst>
@@ -8466,7 +8466,7 @@
           </p:nvPr>
         </p:nvGraphicFramePr>
         <p:xfrm>
-          <a:off x="608076" y="2621280"/>
+          <a:off x="608076" y="2231136"/>
           <a:ext cx="10972800" cy="914400"/>
         </p:xfrm>
         <a:graphic>
@@ -8478,7 +8478,7 @@
                 <a:gridCol w="4498848"/>
                 <a:gridCol w="4498848"/>
               </a:tblGrid>
-              <a:tr h="472440">
+              <a:tr h="481584">
                 <a:tc>
                   <a:txBody>
                     <a:bodyPr/>
@@ -8673,7 +8673,7 @@
                   </a:tcPr>
                 </a:tc>
               </a:tr>
-              <a:tr h="472440">
+              <a:tr h="853440">
                 <a:tc>
                   <a:txBody>
                     <a:bodyPr/>
@@ -8921,7 +8921,7 @@
                   </a:tcPr>
                 </a:tc>
               </a:tr>
-              <a:tr h="472440">
+              <a:tr h="853440">
                 <a:tc>
                   <a:txBody>
                     <a:bodyPr/>
@@ -9169,7 +9169,7 @@
                   </a:tcPr>
                 </a:tc>
               </a:tr>
-              <a:tr h="472440">
+              <a:tr h="481584">
                 <a:tc>
                   <a:txBody>
                     <a:bodyPr/>
